--- a/docs/presentaciones/planta/planta-agua.pptx
+++ b/docs/presentaciones/planta/planta-agua.pptx
@@ -2226,7 +2226,7 @@
                 <a:ea typeface="Calibri" pitchFamily="34" charset="-122"/>
                 <a:cs typeface="Calibri" pitchFamily="34" charset="-120"/>
               </a:rPr>
-              <a:t>PROPUESTA DE SISTEMA INTEGRAL · PLANTA PURIFICADORA</a:t>
+              <a:t>EHABSA · PROPUESTA DE SISTEMA INTEGRAL</a:t>
             </a:r>
             <a:endParaRPr lang="en-US" sz="1200" dirty="0"/>
           </a:p>
@@ -2507,7 +2507,7 @@
       </p:sp>
       <p:pic>
         <p:nvPicPr>
-          <p:cNvPr id="5" name="Image 0" descr="/tmp/claude-0/-home-user-contabilidad-os/2aa77089-8721-5218-8b61-82d65ceb99c2/scratchpad/deck/planta/png/normatividad.png">    </p:cNvPr>
+          <p:cNvPr id="5" name="Image 0" descr="/home/user/contabilidad-os/docs/presentaciones/planta/generador/planta/png/normatividad.png">    </p:cNvPr>
           <p:cNvPicPr>
             <a:picLocks noChangeAspect="1"/>
           </p:cNvPicPr>
@@ -2581,7 +2581,7 @@
       </p:sp>
       <p:pic>
         <p:nvPicPr>
-          <p:cNvPr id="3" name="Image 0" descr="/tmp/claude-0/-home-user-contabilidad-os/2aa77089-8721-5218-8b61-82d65ceb99c2/scratchpad/deck/planta/png/remision.png">    </p:cNvPr>
+          <p:cNvPr id="3" name="Image 0" descr="/home/user/contabilidad-os/docs/presentaciones/planta/generador/planta/png/remision.png">    </p:cNvPr>
           <p:cNvPicPr>
             <a:picLocks noChangeAspect="1"/>
           </p:cNvPicPr>
@@ -4129,7 +4129,7 @@
                 <a:ea typeface="Calibri" pitchFamily="34" charset="-122"/>
                 <a:cs typeface="Calibri" pitchFamily="34" charset="-120"/>
               </a:rPr>
-              <a:t>Planta purificadora</a:t>
+              <a:t>EHABSA</a:t>
             </a:r>
             <a:endParaRPr lang="en-US" sz="950" dirty="0"/>
           </a:p>
@@ -4973,7 +4973,7 @@
                 <a:ea typeface="Calibri" pitchFamily="34" charset="-122"/>
                 <a:cs typeface="Calibri" pitchFamily="34" charset="-120"/>
               </a:rPr>
-              <a:t>Planta purificadora</a:t>
+              <a:t>EHABSA</a:t>
             </a:r>
             <a:endParaRPr lang="en-US" sz="950" dirty="0"/>
           </a:p>
@@ -5716,7 +5716,7 @@
                 <a:ea typeface="Calibri" pitchFamily="34" charset="-122"/>
                 <a:cs typeface="Calibri" pitchFamily="34" charset="-120"/>
               </a:rPr>
-              <a:t>Planta purificadora</a:t>
+              <a:t>EHABSA</a:t>
             </a:r>
             <a:endParaRPr lang="en-US" sz="950" dirty="0"/>
           </a:p>
@@ -6504,7 +6504,7 @@
                 <a:ea typeface="Calibri" pitchFamily="34" charset="-122"/>
                 <a:cs typeface="Calibri" pitchFamily="34" charset="-120"/>
               </a:rPr>
-              <a:t>Planta purificadora  ·  Propuesta de sistema integral  ·  Agosto 2026</a:t>
+              <a:t>EHABSA  ·  Propuesta de sistema integral  ·  Agosto 2026</a:t>
             </a:r>
             <a:endParaRPr lang="en-US" sz="1150" dirty="0"/>
           </a:p>
@@ -7393,7 +7393,7 @@
                 <a:ea typeface="Calibri" pitchFamily="34" charset="-122"/>
                 <a:cs typeface="Calibri" pitchFamily="34" charset="-120"/>
               </a:rPr>
-              <a:t>Planta purificadora</a:t>
+              <a:t>EHABSA</a:t>
             </a:r>
             <a:endParaRPr lang="en-US" sz="950" dirty="0"/>
           </a:p>
@@ -8996,7 +8996,7 @@
                 <a:ea typeface="Calibri" pitchFamily="34" charset="-122"/>
                 <a:cs typeface="Calibri" pitchFamily="34" charset="-120"/>
               </a:rPr>
-              <a:t>Planta purificadora</a:t>
+              <a:t>EHABSA</a:t>
             </a:r>
             <a:endParaRPr lang="en-US" sz="950" dirty="0"/>
           </a:p>
@@ -9199,7 +9199,7 @@
       </p:sp>
       <p:pic>
         <p:nvPicPr>
-          <p:cNvPr id="5" name="Image 0" descr="/tmp/claude-0/-home-user-contabilidad-os/2aa77089-8721-5218-8b61-82d65ceb99c2/scratchpad/deck/planta/png/tablero.png">    </p:cNvPr>
+          <p:cNvPr id="5" name="Image 0" descr="/home/user/contabilidad-os/docs/presentaciones/planta/generador/planta/png/tablero.png">    </p:cNvPr>
           <p:cNvPicPr>
             <a:picLocks noChangeAspect="1"/>
           </p:cNvPicPr>
@@ -9379,7 +9379,7 @@
       </p:sp>
       <p:pic>
         <p:nvPicPr>
-          <p:cNvPr id="5" name="Image 0" descr="/tmp/claude-0/-home-user-contabilidad-os/2aa77089-8721-5218-8b61-82d65ceb99c2/scratchpad/deck/planta/png/produccion.png">    </p:cNvPr>
+          <p:cNvPr id="5" name="Image 0" descr="/home/user/contabilidad-os/docs/presentaciones/planta/generador/planta/png/produccion.png">    </p:cNvPr>
           <p:cNvPicPr>
             <a:picLocks noChangeAspect="1"/>
           </p:cNvPicPr>
@@ -9559,7 +9559,7 @@
       </p:sp>
       <p:pic>
         <p:nvPicPr>
-          <p:cNvPr id="5" name="Image 0" descr="/tmp/claude-0/-home-user-contabilidad-os/2aa77089-8721-5218-8b61-82d65ceb99c2/scratchpad/deck/planta/png/envases.png">    </p:cNvPr>
+          <p:cNvPr id="5" name="Image 0" descr="/home/user/contabilidad-os/docs/presentaciones/planta/generador/planta/png/envases.png">    </p:cNvPr>
           <p:cNvPicPr>
             <a:picLocks noChangeAspect="1"/>
           </p:cNvPicPr>
@@ -9739,7 +9739,7 @@
       </p:sp>
       <p:pic>
         <p:nvPicPr>
-          <p:cNvPr id="5" name="Image 0" descr="/tmp/claude-0/-home-user-contabilidad-os/2aa77089-8721-5218-8b61-82d65ceb99c2/scratchpad/deck/planta/png/gobierno.png">    </p:cNvPr>
+          <p:cNvPr id="5" name="Image 0" descr="/home/user/contabilidad-os/docs/presentaciones/planta/generador/planta/png/gobierno.png">    </p:cNvPr>
           <p:cNvPicPr>
             <a:picLocks noChangeAspect="1"/>
           </p:cNvPicPr>
@@ -9919,7 +9919,7 @@
       </p:sp>
       <p:pic>
         <p:nvPicPr>
-          <p:cNvPr id="5" name="Image 0" descr="/tmp/claude-0/-home-user-contabilidad-os/2aa77089-8721-5218-8b61-82d65ceb99c2/scratchpad/deck/planta/png/cartera.png">    </p:cNvPr>
+          <p:cNvPr id="5" name="Image 0" descr="/home/user/contabilidad-os/docs/presentaciones/planta/generador/planta/png/cartera.png">    </p:cNvPr>
           <p:cNvPicPr>
             <a:picLocks noChangeAspect="1"/>
           </p:cNvPicPr>
@@ -10099,7 +10099,7 @@
       </p:sp>
       <p:pic>
         <p:nvPicPr>
-          <p:cNvPr id="5" name="Image 0" descr="/tmp/claude-0/-home-user-contabilidad-os/2aa77089-8721-5218-8b61-82d65ceb99c2/scratchpad/deck/planta/png/estadocuenta.png">    </p:cNvPr>
+          <p:cNvPr id="5" name="Image 0" descr="/home/user/contabilidad-os/docs/presentaciones/planta/generador/planta/png/estadocuenta.png">    </p:cNvPr>
           <p:cNvPicPr>
             <a:picLocks noChangeAspect="1"/>
           </p:cNvPicPr>
